--- a/exports/pptx/lessons/primary-module-02-panchabhuta/day-03-fire-air.pptx
+++ b/exports/pptx/lessons/primary-module-02-panchabhuta/day-03-fire-air.pptx
@@ -17,9 +17,11 @@
     <p:sldId id="265" r:id="rId11"/>
     <p:sldId id="266" r:id="rId12"/>
     <p:sldId id="267" r:id="rId13"/>
+    <p:sldId id="268" r:id="rId14"/>
+    <p:sldId id="269" r:id="rId15"/>
   </p:sldIdLst>
   <p:notesMasterIdLst>
-    <p:notesMasterId r:id="rId14"/>
+    <p:notesMasterId r:id="rId16"/>
   </p:notesMasterIdLst>
   <p:sldSz cx="9144000" cy="5143500"/>
   <p:notesSz cx="5143500" cy="9144000"/>
@@ -801,6 +803,182 @@
             <a:fld id="{F7021451-1387-4CA6-816F-3879F97B5CBC}" type="slidenum">
               <a:rPr lang="en-US"/>
               <a:t>12</a:t>
+            </a:fld>
+            <a:endParaRPr lang="en-US"/>
+          </a:p>
+        </p:txBody>
+      </p:sp>
+    </p:spTree>
+    <p:extLst>
+      <p:ext uri="{BB962C8B-B14F-4D97-AF65-F5344CB8AC3E}">
+        <p14:creationId xmlns:p14="http://schemas.microsoft.com/office/powerpoint/2010/main" val="1024086991"/>
+      </p:ext>
+    </p:extLst>
+  </p:cSld>
+  <p:clrMapOvr>
+    <a:masterClrMapping/>
+  </p:clrMapOvr>
+</p:notes>
+</file>
+
+<file path=ppt/notesSlides/notesSlide13.xml><?xml version="1.0" encoding="utf-8"?>
+<p:notes xmlns:a="http://schemas.openxmlformats.org/drawingml/2006/main" xmlns:r="http://schemas.openxmlformats.org/officeDocument/2006/relationships" xmlns:p="http://schemas.openxmlformats.org/presentationml/2006/main">
+  <p:cSld>
+    <p:spTree>
+      <p:nvGrpSpPr>
+        <p:cNvPr id="1" name=""/>
+        <p:cNvGrpSpPr/>
+        <p:nvPr/>
+      </p:nvGrpSpPr>
+      <p:grpSpPr>
+        <a:xfrm>
+          <a:off x="0" y="0"/>
+          <a:ext cx="0" cy="0"/>
+          <a:chOff x="0" y="0"/>
+          <a:chExt cx="0" cy="0"/>
+        </a:xfrm>
+      </p:grpSpPr>
+      <p:sp>
+        <p:nvSpPr>
+          <p:cNvPr id="2" name="Slide Image Placeholder 1"/>
+          <p:cNvSpPr>
+            <a:spLocks noGrp="1" noRot="1" noChangeAspect="1"/>
+          </p:cNvSpPr>
+          <p:nvPr>
+            <p:ph type="sldImg"/>
+          </p:nvPr>
+        </p:nvSpPr>
+        <p:spPr/>
+      </p:sp>
+      <p:sp>
+        <p:nvSpPr>
+          <p:cNvPr id="3" name="Notes Placeholder 2"/>
+          <p:cNvSpPr>
+            <a:spLocks noGrp="1"/>
+          </p:cNvSpPr>
+          <p:nvPr>
+            <p:ph type="body" idx="1"/>
+          </p:nvPr>
+        </p:nvSpPr>
+        <p:spPr/>
+        <p:txBody>
+          <a:bodyPr/>
+          <a:lstStyle/>
+          <a:p>
+            <a:r>
+              <a:rPr lang="en-US" dirty="0"/>
+              <a:t/>
+            </a:r>
+            <a:endParaRPr lang="en-US" dirty="0"/>
+          </a:p>
+        </p:txBody>
+      </p:sp>
+      <p:sp>
+        <p:nvSpPr>
+          <p:cNvPr id="4" name="Slide Number Placeholder 3"/>
+          <p:cNvSpPr>
+            <a:spLocks noGrp="1"/>
+          </p:cNvSpPr>
+          <p:nvPr>
+            <p:ph type="sldNum" sz="quarter" idx="10"/>
+          </p:nvPr>
+        </p:nvSpPr>
+        <p:spPr/>
+        <p:txBody>
+          <a:bodyPr/>
+          <a:lstStyle/>
+          <a:p>
+            <a:fld id="{F7021451-1387-4CA6-816F-3879F97B5CBC}" type="slidenum">
+              <a:rPr lang="en-US"/>
+              <a:t>13</a:t>
+            </a:fld>
+            <a:endParaRPr lang="en-US"/>
+          </a:p>
+        </p:txBody>
+      </p:sp>
+    </p:spTree>
+    <p:extLst>
+      <p:ext uri="{BB962C8B-B14F-4D97-AF65-F5344CB8AC3E}">
+        <p14:creationId xmlns:p14="http://schemas.microsoft.com/office/powerpoint/2010/main" val="1024086991"/>
+      </p:ext>
+    </p:extLst>
+  </p:cSld>
+  <p:clrMapOvr>
+    <a:masterClrMapping/>
+  </p:clrMapOvr>
+</p:notes>
+</file>
+
+<file path=ppt/notesSlides/notesSlide14.xml><?xml version="1.0" encoding="utf-8"?>
+<p:notes xmlns:a="http://schemas.openxmlformats.org/drawingml/2006/main" xmlns:r="http://schemas.openxmlformats.org/officeDocument/2006/relationships" xmlns:p="http://schemas.openxmlformats.org/presentationml/2006/main">
+  <p:cSld>
+    <p:spTree>
+      <p:nvGrpSpPr>
+        <p:cNvPr id="1" name=""/>
+        <p:cNvGrpSpPr/>
+        <p:nvPr/>
+      </p:nvGrpSpPr>
+      <p:grpSpPr>
+        <a:xfrm>
+          <a:off x="0" y="0"/>
+          <a:ext cx="0" cy="0"/>
+          <a:chOff x="0" y="0"/>
+          <a:chExt cx="0" cy="0"/>
+        </a:xfrm>
+      </p:grpSpPr>
+      <p:sp>
+        <p:nvSpPr>
+          <p:cNvPr id="2" name="Slide Image Placeholder 1"/>
+          <p:cNvSpPr>
+            <a:spLocks noGrp="1" noRot="1" noChangeAspect="1"/>
+          </p:cNvSpPr>
+          <p:nvPr>
+            <p:ph type="sldImg"/>
+          </p:nvPr>
+        </p:nvSpPr>
+        <p:spPr/>
+      </p:sp>
+      <p:sp>
+        <p:nvSpPr>
+          <p:cNvPr id="3" name="Notes Placeholder 2"/>
+          <p:cNvSpPr>
+            <a:spLocks noGrp="1"/>
+          </p:cNvSpPr>
+          <p:nvPr>
+            <p:ph type="body" idx="1"/>
+          </p:nvPr>
+        </p:nvSpPr>
+        <p:spPr/>
+        <p:txBody>
+          <a:bodyPr/>
+          <a:lstStyle/>
+          <a:p>
+            <a:r>
+              <a:rPr lang="en-US" dirty="0"/>
+              <a:t/>
+            </a:r>
+            <a:endParaRPr lang="en-US" dirty="0"/>
+          </a:p>
+        </p:txBody>
+      </p:sp>
+      <p:sp>
+        <p:nvSpPr>
+          <p:cNvPr id="4" name="Slide Number Placeholder 3"/>
+          <p:cNvSpPr>
+            <a:spLocks noGrp="1"/>
+          </p:cNvSpPr>
+          <p:nvPr>
+            <p:ph type="sldNum" sz="quarter" idx="10"/>
+          </p:nvPr>
+        </p:nvSpPr>
+        <p:spPr/>
+        <p:txBody>
+          <a:bodyPr/>
+          <a:lstStyle/>
+          <a:p>
+            <a:fld id="{F7021451-1387-4CA6-816F-3879F97B5CBC}" type="slidenum">
+              <a:rPr lang="en-US"/>
+              <a:t>14</a:t>
             </a:fld>
             <a:endParaRPr lang="en-US"/>
           </a:p>
@@ -2054,194 +2232,6 @@
         </p:nvSpPr>
         <p:spPr>
           <a:xfrm>
-            <a:off x="406301" y="1223963"/>
-            <a:ext cx="8498026" cy="274290"/>
-          </a:xfrm>
-          <a:prstGeom prst="rect">
-            <a:avLst/>
-          </a:prstGeom>
-          <a:noFill/>
-          <a:ln/>
-        </p:spPr>
-        <p:txBody>
-          <a:bodyPr wrap="square" lIns="0" tIns="0" rIns="0" bIns="0" rtlCol="0" anchor="t"/>
-          <a:lstStyle/>
-          <a:p>
-            <a:pPr algn="l" indent="0" marL="0">
-              <a:lnSpc>
-                <a:spcPts val="2160"/>
-              </a:lnSpc>
-              <a:spcBef>
-                <a:spcPts val="600"/>
-              </a:spcBef>
-              <a:spcAft>
-                <a:spcPts val="800"/>
-              </a:spcAft>
-              <a:buNone/>
-            </a:pPr>
-            <a:r>
-              <a:rPr lang="en-US" sz="1800" b="1" dirty="0">
-                <a:solidFill>
-                  <a:srgbClr val="E07A5F"/>
-                </a:solidFill>
-                <a:latin typeface="Georgia" pitchFamily="34" charset="0"/>
-                <a:ea typeface="Georgia" pitchFamily="34" charset="-122"/>
-                <a:cs typeface="Georgia" pitchFamily="34" charset="-120"/>
-              </a:rPr>
-              <a:t>Goal</a:t>
-            </a:r>
-            <a:endParaRPr lang="en-US" sz="1800" dirty="0"/>
-          </a:p>
-        </p:txBody>
-      </p:sp>
-      <p:sp>
-        <p:nvSpPr>
-          <p:cNvPr id="6" name="Text 4"/>
-          <p:cNvSpPr/>
-          <p:nvPr/>
-        </p:nvSpPr>
-        <p:spPr>
-          <a:xfrm>
-            <a:off x="406301" y="1637854"/>
-            <a:ext cx="8498026" cy="213271"/>
-          </a:xfrm>
-          <a:prstGeom prst="rect">
-            <a:avLst/>
-          </a:prstGeom>
-          <a:noFill/>
-          <a:ln/>
-        </p:spPr>
-        <p:txBody>
-          <a:bodyPr wrap="square" lIns="0" tIns="0" rIns="0" bIns="0" rtlCol="0" anchor="t"/>
-          <a:lstStyle/>
-          <a:p>
-            <a:pPr algn="l" indent="0" marL="0">
-              <a:lnSpc>
-                <a:spcPts val="1680"/>
-              </a:lnSpc>
-              <a:spcBef>
-                <a:spcPts val="300"/>
-              </a:spcBef>
-              <a:spcAft>
-                <a:spcPts val="300"/>
-              </a:spcAft>
-              <a:buNone/>
-            </a:pPr>
-            <a:r>
-              <a:rPr lang="en-US" sz="1200" dirty="0">
-                <a:solidFill>
-                  <a:srgbClr val="2C2C2C"/>
-                </a:solidFill>
-                <a:latin typeface="Verdana" pitchFamily="34" charset="0"/>
-                <a:ea typeface="Verdana" pitchFamily="34" charset="-122"/>
-                <a:cs typeface="Verdana" pitchFamily="34" charset="-120"/>
-              </a:rPr>
-              <a:t>Children explore </a:t>
-            </a:r>
-            <a:pPr algn="l" indent="0" marL="0">
-              <a:lnSpc>
-                <a:spcPts val="1680"/>
-              </a:lnSpc>
-              <a:spcBef>
-                <a:spcPts val="300"/>
-              </a:spcBef>
-              <a:spcAft>
-                <a:spcPts val="300"/>
-              </a:spcAft>
-              <a:buNone/>
-            </a:pPr>
-            <a:r>
-              <a:rPr lang="en-US" sz="1200" i="1" dirty="0">
-                <a:solidFill>
-                  <a:srgbClr val="2C2C2C"/>
-                </a:solidFill>
-                <a:latin typeface="Verdana" pitchFamily="34" charset="0"/>
-                <a:ea typeface="Verdana" pitchFamily="34" charset="-122"/>
-                <a:cs typeface="Verdana" pitchFamily="34" charset="-120"/>
-              </a:rPr>
-              <a:t>tejas</a:t>
-            </a:r>
-            <a:pPr algn="l" indent="0" marL="0">
-              <a:lnSpc>
-                <a:spcPts val="1680"/>
-              </a:lnSpc>
-              <a:spcBef>
-                <a:spcPts val="300"/>
-              </a:spcBef>
-              <a:spcAft>
-                <a:spcPts val="300"/>
-              </a:spcAft>
-              <a:buNone/>
-            </a:pPr>
-            <a:r>
-              <a:rPr lang="en-US" sz="1200" dirty="0">
-                <a:solidFill>
-                  <a:srgbClr val="2C2C2C"/>
-                </a:solidFill>
-                <a:latin typeface="Verdana" pitchFamily="34" charset="0"/>
-                <a:ea typeface="Verdana" pitchFamily="34" charset="-122"/>
-                <a:cs typeface="Verdana" pitchFamily="34" charset="-120"/>
-              </a:rPr>
-              <a:t> and </a:t>
-            </a:r>
-            <a:pPr algn="l" indent="0" marL="0">
-              <a:lnSpc>
-                <a:spcPts val="1680"/>
-              </a:lnSpc>
-              <a:spcBef>
-                <a:spcPts val="300"/>
-              </a:spcBef>
-              <a:spcAft>
-                <a:spcPts val="300"/>
-              </a:spcAft>
-              <a:buNone/>
-            </a:pPr>
-            <a:r>
-              <a:rPr lang="en-US" sz="1200" i="1" dirty="0">
-                <a:solidFill>
-                  <a:srgbClr val="2C2C2C"/>
-                </a:solidFill>
-                <a:latin typeface="Verdana" pitchFamily="34" charset="0"/>
-                <a:ea typeface="Verdana" pitchFamily="34" charset="-122"/>
-                <a:cs typeface="Verdana" pitchFamily="34" charset="-120"/>
-              </a:rPr>
-              <a:t>vāyu</a:t>
-            </a:r>
-            <a:pPr algn="l" indent="0" marL="0">
-              <a:lnSpc>
-                <a:spcPts val="1680"/>
-              </a:lnSpc>
-              <a:spcBef>
-                <a:spcPts val="300"/>
-              </a:spcBef>
-              <a:spcAft>
-                <a:spcPts val="300"/>
-              </a:spcAft>
-              <a:buNone/>
-            </a:pPr>
-            <a:r>
-              <a:rPr lang="en-US" sz="1200" dirty="0">
-                <a:solidFill>
-                  <a:srgbClr val="2C2C2C"/>
-                </a:solidFill>
-                <a:latin typeface="Verdana" pitchFamily="34" charset="0"/>
-                <a:ea typeface="Verdana" pitchFamily="34" charset="-122"/>
-                <a:cs typeface="Verdana" pitchFamily="34" charset="-120"/>
-              </a:rPr>
-              <a:t> through warmth, breeze, and drawing.</a:t>
-            </a:r>
-            <a:endParaRPr lang="en-US" sz="1200" dirty="0"/>
-          </a:p>
-        </p:txBody>
-      </p:sp>
-      <p:sp>
-        <p:nvSpPr>
-          <p:cNvPr id="7" name="Text 5"/>
-          <p:cNvSpPr/>
-          <p:nvPr/>
-        </p:nvSpPr>
-        <p:spPr>
-          <a:xfrm>
             <a:off x="406301" y="4434929"/>
             <a:ext cx="8498026" cy="213271"/>
           </a:xfrm>
@@ -2386,7 +2376,7 @@
                 <a:ea typeface="Georgia" pitchFamily="34" charset="-122"/>
                 <a:cs typeface="Georgia" pitchFamily="34" charset="-120"/>
               </a:rPr>
-              <a:t>Homework / take-home</a:t>
+              <a:t>Draw (10 min)</a:t>
             </a:r>
             <a:endParaRPr lang="en-US" sz="1800" dirty="0"/>
           </a:p>
@@ -2401,7 +2391,7 @@
         <p:spPr>
           <a:xfrm>
             <a:off x="406301" y="870942"/>
-            <a:ext cx="8498026" cy="426541"/>
+            <a:ext cx="8498026" cy="213271"/>
           </a:xfrm>
           <a:prstGeom prst="rect">
             <a:avLst/>
@@ -2434,22 +2424,45 @@
                 <a:ea typeface="Verdana" pitchFamily="34" charset="-122"/>
                 <a:cs typeface="Verdana" pitchFamily="34" charset="-120"/>
               </a:rPr>
-              <a:t>– Tomorrow: notice the </a:t>
-            </a:r>
-            <a:pPr algn="l" indent="0" marL="0">
-              <a:lnSpc>
-                <a:spcPts val="1680"/>
-              </a:lnSpc>
-              <a:spcBef>
-                <a:spcPts val="300"/>
-              </a:spcBef>
-              <a:spcAft>
-                <a:spcPts val="300"/>
-              </a:spcAft>
-              <a:buNone/>
-            </a:pPr>
-            <a:r>
-              <a:rPr lang="en-US" sz="1200" b="1" dirty="0">
+              <a:t>Each child draws:</a:t>
+            </a:r>
+            <a:endParaRPr lang="en-US" sz="1200" dirty="0"/>
+          </a:p>
+        </p:txBody>
+      </p:sp>
+      <p:sp>
+        <p:nvSpPr>
+          <p:cNvPr id="5" name="Text 3"/>
+          <p:cNvSpPr/>
+          <p:nvPr/>
+        </p:nvSpPr>
+        <p:spPr>
+          <a:xfrm>
+            <a:off x="634901" y="1173063"/>
+            <a:ext cx="8102798" cy="525661"/>
+          </a:xfrm>
+          <a:prstGeom prst="rect">
+            <a:avLst/>
+          </a:prstGeom>
+          <a:noFill/>
+          <a:ln/>
+        </p:spPr>
+        <p:txBody>
+          <a:bodyPr wrap="square" lIns="0" tIns="0" rIns="0" bIns="0" rtlCol="0" anchor="t"/>
+          <a:lstStyle/>
+          <a:p>
+            <a:pPr algn="l" marL="342900" indent="-342900">
+              <a:lnSpc>
+                <a:spcPts val="1620"/>
+              </a:lnSpc>
+              <a:spcAft>
+                <a:spcPts val="300"/>
+              </a:spcAft>
+              <a:buSzPct val="100000"/>
+              <a:buChar char="•"/>
+            </a:pPr>
+            <a:r>
+              <a:rPr lang="en-US" sz="1200" dirty="0">
                 <a:solidFill>
                   <a:srgbClr val="2C2C2C"/>
                 </a:solidFill>
@@ -2457,19 +2470,20 @@
                 <a:ea typeface="Verdana" pitchFamily="34" charset="-122"/>
                 <a:cs typeface="Verdana" pitchFamily="34" charset="-120"/>
               </a:rPr>
-              <a:t>empty space</a:t>
-            </a:r>
-            <a:pPr algn="l" indent="0" marL="0">
-              <a:lnSpc>
-                <a:spcPts val="1680"/>
-              </a:lnSpc>
-              <a:spcBef>
-                <a:spcPts val="300"/>
-              </a:spcBef>
-              <a:spcAft>
-                <a:spcPts val="300"/>
-              </a:spcAft>
-              <a:buNone/>
+              <a:t>TOP: one Tejas thing they like.</a:t>
+            </a:r>
+            <a:endParaRPr lang="en-US" sz="1200" dirty="0"/>
+          </a:p>
+          <a:p>
+            <a:pPr algn="l" marL="342900" indent="-342900">
+              <a:lnSpc>
+                <a:spcPts val="1620"/>
+              </a:lnSpc>
+              <a:spcAft>
+                <a:spcPts val="300"/>
+              </a:spcAft>
+              <a:buSzPct val="100000"/>
+              <a:buChar char="•"/>
             </a:pPr>
             <a:r>
               <a:rPr lang="en-US" sz="1200" dirty="0">
@@ -2480,7 +2494,7 @@
                 <a:ea typeface="Verdana" pitchFamily="34" charset="-122"/>
                 <a:cs typeface="Verdana" pitchFamily="34" charset="-120"/>
               </a:rPr>
-              <a:t> in your bedroom. How big is it? Can you fit your arms inside without touching anything?</a:t>
+              <a:t>BOTTOM: one Vāyu thing they like.</a:t>
             </a:r>
             <a:endParaRPr lang="en-US" sz="1200" dirty="0"/>
           </a:p>
@@ -2488,7 +2502,7 @@
       </p:sp>
       <p:sp>
         <p:nvSpPr>
-          <p:cNvPr id="5" name="Text 3"/>
+          <p:cNvPr id="6" name="Text 4"/>
           <p:cNvSpPr/>
           <p:nvPr/>
         </p:nvSpPr>
@@ -2638,7 +2652,7 @@
                 <a:ea typeface="Georgia" pitchFamily="34" charset="-122"/>
                 <a:cs typeface="Georgia" pitchFamily="34" charset="-120"/>
               </a:rPr>
-              <a:t>Differentiation</a:t>
+              <a:t>Show + chant (3 min)</a:t>
             </a:r>
             <a:endParaRPr lang="en-US" sz="1800" dirty="0"/>
           </a:p>
@@ -2652,8 +2666,8 @@
         </p:nvSpPr>
         <p:spPr>
           <a:xfrm>
-            <a:off x="634901" y="883593"/>
-            <a:ext cx="8102798" cy="525661"/>
+            <a:off x="406301" y="870942"/>
+            <a:ext cx="8498026" cy="213271"/>
           </a:xfrm>
           <a:prstGeom prst="rect">
             <a:avLst/>
@@ -2665,18 +2679,20 @@
           <a:bodyPr wrap="square" lIns="0" tIns="0" rIns="0" bIns="0" rtlCol="0" anchor="t"/>
           <a:lstStyle/>
           <a:p>
-            <a:pPr algn="l" marL="342900" indent="-342900">
-              <a:lnSpc>
-                <a:spcPts val="1620"/>
-              </a:lnSpc>
-              <a:spcAft>
-                <a:spcPts val="300"/>
-              </a:spcAft>
-              <a:buSzPct val="100000"/>
-              <a:buChar char="•"/>
-            </a:pPr>
-            <a:r>
-              <a:rPr lang="en-US" sz="1200" b="1" dirty="0">
+            <a:pPr algn="l" indent="0" marL="0">
+              <a:lnSpc>
+                <a:spcPts val="1680"/>
+              </a:lnSpc>
+              <a:spcBef>
+                <a:spcPts val="300"/>
+              </a:spcBef>
+              <a:spcAft>
+                <a:spcPts val="300"/>
+              </a:spcAft>
+              <a:buNone/>
+            </a:pPr>
+            <a:r>
+              <a:rPr lang="en-US" sz="1200" dirty="0">
                 <a:solidFill>
                   <a:srgbClr val="2C2C2C"/>
                 </a:solidFill>
@@ -2684,71 +2700,7 @@
                 <a:ea typeface="Verdana" pitchFamily="34" charset="-122"/>
                 <a:cs typeface="Verdana" pitchFamily="34" charset="-120"/>
               </a:rPr>
-              <a:t>Tier up:</a:t>
-            </a:r>
-            <a:pPr algn="l" indent="0" marL="0">
-              <a:lnSpc>
-                <a:spcPts val="1620"/>
-              </a:lnSpc>
-              <a:spcAft>
-                <a:spcPts val="300"/>
-              </a:spcAft>
-              <a:buNone/>
-            </a:pPr>
-            <a:r>
-              <a:rPr lang="en-US" sz="1200" dirty="0">
-                <a:solidFill>
-                  <a:srgbClr val="2C2C2C"/>
-                </a:solidFill>
-                <a:latin typeface="Verdana" pitchFamily="34" charset="0"/>
-                <a:ea typeface="Verdana" pitchFamily="34" charset="-122"/>
-                <a:cs typeface="Verdana" pitchFamily="34" charset="-120"/>
-              </a:rPr>
-              <a:t> Why is the sun TOO MUCH Tejas in summer? Why is wind TOO MUCH Vāyu during a storm?</a:t>
-            </a:r>
-            <a:endParaRPr lang="en-US" sz="1200" dirty="0"/>
-          </a:p>
-          <a:p>
-            <a:pPr algn="l" marL="342900" indent="-342900">
-              <a:lnSpc>
-                <a:spcPts val="1620"/>
-              </a:lnSpc>
-              <a:spcAft>
-                <a:spcPts val="300"/>
-              </a:spcAft>
-              <a:buSzPct val="100000"/>
-              <a:buChar char="•"/>
-            </a:pPr>
-            <a:r>
-              <a:rPr lang="en-US" sz="1200" b="1" dirty="0">
-                <a:solidFill>
-                  <a:srgbClr val="2C2C2C"/>
-                </a:solidFill>
-                <a:latin typeface="Verdana" pitchFamily="34" charset="0"/>
-                <a:ea typeface="Verdana" pitchFamily="34" charset="-122"/>
-                <a:cs typeface="Verdana" pitchFamily="34" charset="-120"/>
-              </a:rPr>
-              <a:t>Tier down:</a:t>
-            </a:r>
-            <a:pPr algn="l" indent="0" marL="0">
-              <a:lnSpc>
-                <a:spcPts val="1620"/>
-              </a:lnSpc>
-              <a:spcAft>
-                <a:spcPts val="300"/>
-              </a:spcAft>
-              <a:buNone/>
-            </a:pPr>
-            <a:r>
-              <a:rPr lang="en-US" sz="1200" dirty="0">
-                <a:solidFill>
-                  <a:srgbClr val="2C2C2C"/>
-                </a:solidFill>
-                <a:latin typeface="Verdana" pitchFamily="34" charset="0"/>
-                <a:ea typeface="Verdana" pitchFamily="34" charset="-122"/>
-                <a:cs typeface="Verdana" pitchFamily="34" charset="-120"/>
-              </a:rPr>
-              <a:t> Just remember: Tejas = warmth/light, Vāyu = air/wind.</a:t>
+              <a:t>2 shares. Daily chant to close.</a:t>
             </a:r>
             <a:endParaRPr lang="en-US" sz="1200" dirty="0"/>
           </a:p>
@@ -2906,7 +2858,7 @@
                 <a:ea typeface="Georgia" pitchFamily="34" charset="-122"/>
                 <a:cs typeface="Georgia" pitchFamily="34" charset="-120"/>
               </a:rPr>
-              <a:t>Teacher's quick notes</a:t>
+              <a:t>Homework / take-home</a:t>
             </a:r>
             <a:endParaRPr lang="en-US" sz="1800" dirty="0"/>
           </a:p>
@@ -2920,8 +2872,8 @@
         </p:nvSpPr>
         <p:spPr>
           <a:xfrm>
-            <a:off x="406301" y="870942"/>
-            <a:ext cx="8498026" cy="639812"/>
+            <a:off x="634901" y="883593"/>
+            <a:ext cx="8102798" cy="487561"/>
           </a:xfrm>
           <a:prstGeom prst="rect">
             <a:avLst/>
@@ -2933,17 +2885,15 @@
           <a:bodyPr wrap="square" lIns="0" tIns="0" rIns="0" bIns="0" rtlCol="0" anchor="t"/>
           <a:lstStyle/>
           <a:p>
-            <a:pPr algn="l" indent="0" marL="0">
-              <a:lnSpc>
-                <a:spcPts val="1680"/>
-              </a:lnSpc>
-              <a:spcBef>
-                <a:spcPts val="300"/>
-              </a:spcBef>
-              <a:spcAft>
-                <a:spcPts val="300"/>
-              </a:spcAft>
-              <a:buNone/>
+            <a:pPr algn="l" marL="342900" indent="-342900">
+              <a:lnSpc>
+                <a:spcPts val="1620"/>
+              </a:lnSpc>
+              <a:spcAft>
+                <a:spcPts val="300"/>
+              </a:spcAft>
+              <a:buSzPct val="100000"/>
+              <a:buChar char="•"/>
             </a:pPr>
             <a:r>
               <a:rPr lang="en-US" sz="1200" dirty="0">
@@ -2954,7 +2904,543 @@
                 <a:ea typeface="Verdana" pitchFamily="34" charset="-122"/>
                 <a:cs typeface="Verdana" pitchFamily="34" charset="-120"/>
               </a:rPr>
-              <a:t>– For the fire station: NO actual flames. Children's torches/lamps are safe. Body warmth (touching one's own hand) is the most reliable demo. – Some children will giggle when they feel a breeze on their face. Let them giggle — surprise is good for memory.</a:t>
+              <a:t>Tomorrow: notice the </a:t>
+            </a:r>
+            <a:pPr algn="l" indent="0" marL="0">
+              <a:lnSpc>
+                <a:spcPts val="1620"/>
+              </a:lnSpc>
+              <a:spcAft>
+                <a:spcPts val="300"/>
+              </a:spcAft>
+              <a:buNone/>
+            </a:pPr>
+            <a:r>
+              <a:rPr lang="en-US" sz="1200" b="1" dirty="0">
+                <a:solidFill>
+                  <a:srgbClr val="2C2C2C"/>
+                </a:solidFill>
+                <a:latin typeface="Verdana" pitchFamily="34" charset="0"/>
+                <a:ea typeface="Verdana" pitchFamily="34" charset="-122"/>
+                <a:cs typeface="Verdana" pitchFamily="34" charset="-120"/>
+              </a:rPr>
+              <a:t>empty space</a:t>
+            </a:r>
+            <a:pPr algn="l" indent="0" marL="0">
+              <a:lnSpc>
+                <a:spcPts val="1620"/>
+              </a:lnSpc>
+              <a:spcAft>
+                <a:spcPts val="300"/>
+              </a:spcAft>
+              <a:buNone/>
+            </a:pPr>
+            <a:r>
+              <a:rPr lang="en-US" sz="1200" dirty="0">
+                <a:solidFill>
+                  <a:srgbClr val="2C2C2C"/>
+                </a:solidFill>
+                <a:latin typeface="Verdana" pitchFamily="34" charset="0"/>
+                <a:ea typeface="Verdana" pitchFamily="34" charset="-122"/>
+                <a:cs typeface="Verdana" pitchFamily="34" charset="-120"/>
+              </a:rPr>
+              <a:t> in your bedroom. How big is it? Can you fit your arms inside without touching anything?</a:t>
+            </a:r>
+            <a:endParaRPr lang="en-US" sz="1200" dirty="0"/>
+          </a:p>
+        </p:txBody>
+      </p:sp>
+      <p:sp>
+        <p:nvSpPr>
+          <p:cNvPr id="5" name="Text 3"/>
+          <p:cNvSpPr/>
+          <p:nvPr/>
+        </p:nvSpPr>
+        <p:spPr>
+          <a:xfrm>
+            <a:off x="406301" y="4434929"/>
+            <a:ext cx="8498026" cy="213271"/>
+          </a:xfrm>
+          <a:prstGeom prst="rect">
+            <a:avLst/>
+          </a:prstGeom>
+          <a:noFill/>
+          <a:ln/>
+        </p:spPr>
+        <p:txBody>
+          <a:bodyPr wrap="square" lIns="0" tIns="0" rIns="0" bIns="0" rtlCol="0" anchor="t"/>
+          <a:lstStyle/>
+          <a:p>
+            <a:pPr algn="l" indent="0" marL="0">
+              <a:lnSpc>
+                <a:spcPts val="1680"/>
+              </a:lnSpc>
+              <a:spcBef>
+                <a:spcPts val="300"/>
+              </a:spcBef>
+              <a:spcAft>
+                <a:spcPts val="300"/>
+              </a:spcAft>
+              <a:buNone/>
+            </a:pPr>
+            <a:r>
+              <a:rPr lang="en-US" sz="1200" dirty="0">
+                <a:solidFill>
+                  <a:srgbClr val="2C2C2C"/>
+                </a:solidFill>
+                <a:latin typeface="Verdana" pitchFamily="34" charset="0"/>
+                <a:ea typeface="Verdana" pitchFamily="34" charset="-122"/>
+                <a:cs typeface="Verdana" pitchFamily="34" charset="-120"/>
+              </a:rPr>
+              <a:t>Primary ·  · IKS Curriculum</a:t>
+            </a:r>
+            <a:endParaRPr lang="en-US" sz="1200" dirty="0"/>
+          </a:p>
+        </p:txBody>
+      </p:sp>
+    </p:spTree>
+  </p:cSld>
+  <p:clrMapOvr>
+    <a:masterClrMapping/>
+  </p:clrMapOvr>
+</p:sld>
+</file>
+
+<file path=ppt/slides/slide13.xml><?xml version="1.0" encoding="utf-8"?>
+<p:sld xmlns:a="http://schemas.openxmlformats.org/drawingml/2006/main" xmlns:r="http://schemas.openxmlformats.org/officeDocument/2006/relationships" xmlns:p="http://schemas.openxmlformats.org/presentationml/2006/main">
+  <p:cSld name="Slide 13">
+    <p:bg>
+      <p:bgPr>
+        <a:solidFill>
+          <a:srgbClr val="FAF7F2"/>
+        </a:solidFill>
+      </p:bgPr>
+    </p:bg>
+    <p:spTree>
+      <p:nvGrpSpPr>
+        <p:cNvPr id="1" name=""/>
+        <p:cNvGrpSpPr/>
+        <p:nvPr/>
+      </p:nvGrpSpPr>
+      <p:grpSpPr>
+        <a:xfrm>
+          <a:off x="0" y="0"/>
+          <a:ext cx="0" cy="0"/>
+          <a:chOff x="0" y="0"/>
+          <a:chExt cx="0" cy="0"/>
+        </a:xfrm>
+      </p:grpSpPr>
+      <p:sp>
+        <p:nvSpPr>
+          <p:cNvPr id="2" name="Text 0"/>
+          <p:cNvSpPr/>
+          <p:nvPr/>
+        </p:nvSpPr>
+        <p:spPr>
+          <a:xfrm>
+            <a:off x="0" y="0"/>
+            <a:ext cx="9144000" cy="101501"/>
+          </a:xfrm>
+          <a:prstGeom prst="rect">
+            <a:avLst/>
+          </a:prstGeom>
+          <a:solidFill>
+            <a:srgbClr val="87A96B"/>
+          </a:solidFill>
+          <a:ln/>
+        </p:spPr>
+        <p:txBody>
+          <a:bodyPr wrap="square" rtlCol="0" anchor="ctr"/>
+          <a:lstStyle/>
+          <a:p>
+            <a:pPr indent="0" marL="0">
+              <a:buNone/>
+            </a:pPr>
+            <a:endParaRPr lang="en-US" dirty="0"/>
+          </a:p>
+        </p:txBody>
+      </p:sp>
+      <p:sp>
+        <p:nvSpPr>
+          <p:cNvPr id="3" name="Text 1"/>
+          <p:cNvSpPr/>
+          <p:nvPr/>
+        </p:nvSpPr>
+        <p:spPr>
+          <a:xfrm>
+            <a:off x="406301" y="457051"/>
+            <a:ext cx="8498026" cy="274290"/>
+          </a:xfrm>
+          <a:prstGeom prst="rect">
+            <a:avLst/>
+          </a:prstGeom>
+          <a:noFill/>
+          <a:ln/>
+        </p:spPr>
+        <p:txBody>
+          <a:bodyPr wrap="square" lIns="0" tIns="0" rIns="0" bIns="0" rtlCol="0" anchor="t"/>
+          <a:lstStyle/>
+          <a:p>
+            <a:pPr algn="l" indent="0" marL="0">
+              <a:lnSpc>
+                <a:spcPts val="2160"/>
+              </a:lnSpc>
+              <a:spcBef>
+                <a:spcPts val="600"/>
+              </a:spcBef>
+              <a:spcAft>
+                <a:spcPts val="800"/>
+              </a:spcAft>
+              <a:buNone/>
+            </a:pPr>
+            <a:r>
+              <a:rPr lang="en-US" sz="1800" b="1" dirty="0">
+                <a:solidFill>
+                  <a:srgbClr val="E07A5F"/>
+                </a:solidFill>
+                <a:latin typeface="Georgia" pitchFamily="34" charset="0"/>
+                <a:ea typeface="Georgia" pitchFamily="34" charset="-122"/>
+                <a:cs typeface="Georgia" pitchFamily="34" charset="-120"/>
+              </a:rPr>
+              <a:t>Differentiation</a:t>
+            </a:r>
+            <a:endParaRPr lang="en-US" sz="1800" dirty="0"/>
+          </a:p>
+        </p:txBody>
+      </p:sp>
+      <p:sp>
+        <p:nvSpPr>
+          <p:cNvPr id="4" name="Text 2"/>
+          <p:cNvSpPr/>
+          <p:nvPr/>
+        </p:nvSpPr>
+        <p:spPr>
+          <a:xfrm>
+            <a:off x="634901" y="883593"/>
+            <a:ext cx="8102798" cy="525661"/>
+          </a:xfrm>
+          <a:prstGeom prst="rect">
+            <a:avLst/>
+          </a:prstGeom>
+          <a:noFill/>
+          <a:ln/>
+        </p:spPr>
+        <p:txBody>
+          <a:bodyPr wrap="square" lIns="0" tIns="0" rIns="0" bIns="0" rtlCol="0" anchor="t"/>
+          <a:lstStyle/>
+          <a:p>
+            <a:pPr algn="l" marL="342900" indent="-342900">
+              <a:lnSpc>
+                <a:spcPts val="1620"/>
+              </a:lnSpc>
+              <a:spcAft>
+                <a:spcPts val="300"/>
+              </a:spcAft>
+              <a:buSzPct val="100000"/>
+              <a:buChar char="•"/>
+            </a:pPr>
+            <a:r>
+              <a:rPr lang="en-US" sz="1200" b="1" dirty="0">
+                <a:solidFill>
+                  <a:srgbClr val="2C2C2C"/>
+                </a:solidFill>
+                <a:latin typeface="Verdana" pitchFamily="34" charset="0"/>
+                <a:ea typeface="Verdana" pitchFamily="34" charset="-122"/>
+                <a:cs typeface="Verdana" pitchFamily="34" charset="-120"/>
+              </a:rPr>
+              <a:t>Tier up:</a:t>
+            </a:r>
+            <a:pPr algn="l" indent="0" marL="0">
+              <a:lnSpc>
+                <a:spcPts val="1620"/>
+              </a:lnSpc>
+              <a:spcAft>
+                <a:spcPts val="300"/>
+              </a:spcAft>
+              <a:buNone/>
+            </a:pPr>
+            <a:r>
+              <a:rPr lang="en-US" sz="1200" dirty="0">
+                <a:solidFill>
+                  <a:srgbClr val="2C2C2C"/>
+                </a:solidFill>
+                <a:latin typeface="Verdana" pitchFamily="34" charset="0"/>
+                <a:ea typeface="Verdana" pitchFamily="34" charset="-122"/>
+                <a:cs typeface="Verdana" pitchFamily="34" charset="-120"/>
+              </a:rPr>
+              <a:t> Why is the sun TOO MUCH Tejas in summer? Why is wind TOO MUCH Vāyu during a storm?</a:t>
+            </a:r>
+            <a:endParaRPr lang="en-US" sz="1200" dirty="0"/>
+          </a:p>
+          <a:p>
+            <a:pPr algn="l" marL="342900" indent="-342900">
+              <a:lnSpc>
+                <a:spcPts val="1620"/>
+              </a:lnSpc>
+              <a:spcAft>
+                <a:spcPts val="300"/>
+              </a:spcAft>
+              <a:buSzPct val="100000"/>
+              <a:buChar char="•"/>
+            </a:pPr>
+            <a:r>
+              <a:rPr lang="en-US" sz="1200" b="1" dirty="0">
+                <a:solidFill>
+                  <a:srgbClr val="2C2C2C"/>
+                </a:solidFill>
+                <a:latin typeface="Verdana" pitchFamily="34" charset="0"/>
+                <a:ea typeface="Verdana" pitchFamily="34" charset="-122"/>
+                <a:cs typeface="Verdana" pitchFamily="34" charset="-120"/>
+              </a:rPr>
+              <a:t>Tier down:</a:t>
+            </a:r>
+            <a:pPr algn="l" indent="0" marL="0">
+              <a:lnSpc>
+                <a:spcPts val="1620"/>
+              </a:lnSpc>
+              <a:spcAft>
+                <a:spcPts val="300"/>
+              </a:spcAft>
+              <a:buNone/>
+            </a:pPr>
+            <a:r>
+              <a:rPr lang="en-US" sz="1200" dirty="0">
+                <a:solidFill>
+                  <a:srgbClr val="2C2C2C"/>
+                </a:solidFill>
+                <a:latin typeface="Verdana" pitchFamily="34" charset="0"/>
+                <a:ea typeface="Verdana" pitchFamily="34" charset="-122"/>
+                <a:cs typeface="Verdana" pitchFamily="34" charset="-120"/>
+              </a:rPr>
+              <a:t> Just remember: Tejas = warmth/light, Vāyu = air/wind.</a:t>
+            </a:r>
+            <a:endParaRPr lang="en-US" sz="1200" dirty="0"/>
+          </a:p>
+        </p:txBody>
+      </p:sp>
+      <p:sp>
+        <p:nvSpPr>
+          <p:cNvPr id="5" name="Text 3"/>
+          <p:cNvSpPr/>
+          <p:nvPr/>
+        </p:nvSpPr>
+        <p:spPr>
+          <a:xfrm>
+            <a:off x="406301" y="4434929"/>
+            <a:ext cx="8498026" cy="213271"/>
+          </a:xfrm>
+          <a:prstGeom prst="rect">
+            <a:avLst/>
+          </a:prstGeom>
+          <a:noFill/>
+          <a:ln/>
+        </p:spPr>
+        <p:txBody>
+          <a:bodyPr wrap="square" lIns="0" tIns="0" rIns="0" bIns="0" rtlCol="0" anchor="t"/>
+          <a:lstStyle/>
+          <a:p>
+            <a:pPr algn="l" indent="0" marL="0">
+              <a:lnSpc>
+                <a:spcPts val="1680"/>
+              </a:lnSpc>
+              <a:spcBef>
+                <a:spcPts val="300"/>
+              </a:spcBef>
+              <a:spcAft>
+                <a:spcPts val="300"/>
+              </a:spcAft>
+              <a:buNone/>
+            </a:pPr>
+            <a:r>
+              <a:rPr lang="en-US" sz="1200" dirty="0">
+                <a:solidFill>
+                  <a:srgbClr val="2C2C2C"/>
+                </a:solidFill>
+                <a:latin typeface="Verdana" pitchFamily="34" charset="0"/>
+                <a:ea typeface="Verdana" pitchFamily="34" charset="-122"/>
+                <a:cs typeface="Verdana" pitchFamily="34" charset="-120"/>
+              </a:rPr>
+              <a:t>Primary ·  · IKS Curriculum</a:t>
+            </a:r>
+            <a:endParaRPr lang="en-US" sz="1200" dirty="0"/>
+          </a:p>
+        </p:txBody>
+      </p:sp>
+    </p:spTree>
+  </p:cSld>
+  <p:clrMapOvr>
+    <a:masterClrMapping/>
+  </p:clrMapOvr>
+</p:sld>
+</file>
+
+<file path=ppt/slides/slide14.xml><?xml version="1.0" encoding="utf-8"?>
+<p:sld xmlns:a="http://schemas.openxmlformats.org/drawingml/2006/main" xmlns:r="http://schemas.openxmlformats.org/officeDocument/2006/relationships" xmlns:p="http://schemas.openxmlformats.org/presentationml/2006/main">
+  <p:cSld name="Slide 14">
+    <p:bg>
+      <p:bgPr>
+        <a:solidFill>
+          <a:srgbClr val="FAF7F2"/>
+        </a:solidFill>
+      </p:bgPr>
+    </p:bg>
+    <p:spTree>
+      <p:nvGrpSpPr>
+        <p:cNvPr id="1" name=""/>
+        <p:cNvGrpSpPr/>
+        <p:nvPr/>
+      </p:nvGrpSpPr>
+      <p:grpSpPr>
+        <a:xfrm>
+          <a:off x="0" y="0"/>
+          <a:ext cx="0" cy="0"/>
+          <a:chOff x="0" y="0"/>
+          <a:chExt cx="0" cy="0"/>
+        </a:xfrm>
+      </p:grpSpPr>
+      <p:sp>
+        <p:nvSpPr>
+          <p:cNvPr id="2" name="Text 0"/>
+          <p:cNvSpPr/>
+          <p:nvPr/>
+        </p:nvSpPr>
+        <p:spPr>
+          <a:xfrm>
+            <a:off x="0" y="0"/>
+            <a:ext cx="9144000" cy="101501"/>
+          </a:xfrm>
+          <a:prstGeom prst="rect">
+            <a:avLst/>
+          </a:prstGeom>
+          <a:solidFill>
+            <a:srgbClr val="87A96B"/>
+          </a:solidFill>
+          <a:ln/>
+        </p:spPr>
+        <p:txBody>
+          <a:bodyPr wrap="square" rtlCol="0" anchor="ctr"/>
+          <a:lstStyle/>
+          <a:p>
+            <a:pPr indent="0" marL="0">
+              <a:buNone/>
+            </a:pPr>
+            <a:endParaRPr lang="en-US" dirty="0"/>
+          </a:p>
+        </p:txBody>
+      </p:sp>
+      <p:sp>
+        <p:nvSpPr>
+          <p:cNvPr id="3" name="Text 1"/>
+          <p:cNvSpPr/>
+          <p:nvPr/>
+        </p:nvSpPr>
+        <p:spPr>
+          <a:xfrm>
+            <a:off x="406301" y="457051"/>
+            <a:ext cx="8498026" cy="274290"/>
+          </a:xfrm>
+          <a:prstGeom prst="rect">
+            <a:avLst/>
+          </a:prstGeom>
+          <a:noFill/>
+          <a:ln/>
+        </p:spPr>
+        <p:txBody>
+          <a:bodyPr wrap="square" lIns="0" tIns="0" rIns="0" bIns="0" rtlCol="0" anchor="t"/>
+          <a:lstStyle/>
+          <a:p>
+            <a:pPr algn="l" indent="0" marL="0">
+              <a:lnSpc>
+                <a:spcPts val="2160"/>
+              </a:lnSpc>
+              <a:spcBef>
+                <a:spcPts val="600"/>
+              </a:spcBef>
+              <a:spcAft>
+                <a:spcPts val="800"/>
+              </a:spcAft>
+              <a:buNone/>
+            </a:pPr>
+            <a:r>
+              <a:rPr lang="en-US" sz="1800" b="1" dirty="0">
+                <a:solidFill>
+                  <a:srgbClr val="E07A5F"/>
+                </a:solidFill>
+                <a:latin typeface="Georgia" pitchFamily="34" charset="0"/>
+                <a:ea typeface="Georgia" pitchFamily="34" charset="-122"/>
+                <a:cs typeface="Georgia" pitchFamily="34" charset="-120"/>
+              </a:rPr>
+              <a:t>Teacher's quick notes</a:t>
+            </a:r>
+            <a:endParaRPr lang="en-US" sz="1800" dirty="0"/>
+          </a:p>
+        </p:txBody>
+      </p:sp>
+      <p:sp>
+        <p:nvSpPr>
+          <p:cNvPr id="4" name="Text 2"/>
+          <p:cNvSpPr/>
+          <p:nvPr/>
+        </p:nvSpPr>
+        <p:spPr>
+          <a:xfrm>
+            <a:off x="634901" y="883593"/>
+            <a:ext cx="8102798" cy="937022"/>
+          </a:xfrm>
+          <a:prstGeom prst="rect">
+            <a:avLst/>
+          </a:prstGeom>
+          <a:noFill/>
+          <a:ln/>
+        </p:spPr>
+        <p:txBody>
+          <a:bodyPr wrap="square" lIns="0" tIns="0" rIns="0" bIns="0" rtlCol="0" anchor="t"/>
+          <a:lstStyle/>
+          <a:p>
+            <a:pPr algn="l" marL="342900" indent="-342900">
+              <a:lnSpc>
+                <a:spcPts val="1620"/>
+              </a:lnSpc>
+              <a:spcAft>
+                <a:spcPts val="300"/>
+              </a:spcAft>
+              <a:buSzPct val="100000"/>
+              <a:buChar char="•"/>
+            </a:pPr>
+            <a:r>
+              <a:rPr lang="en-US" sz="1200" dirty="0">
+                <a:solidFill>
+                  <a:srgbClr val="2C2C2C"/>
+                </a:solidFill>
+                <a:latin typeface="Verdana" pitchFamily="34" charset="0"/>
+                <a:ea typeface="Verdana" pitchFamily="34" charset="-122"/>
+                <a:cs typeface="Verdana" pitchFamily="34" charset="-120"/>
+              </a:rPr>
+              <a:t>For the fire station: NO actual flames. Children's torches/lamps are safe. Body warmth (touching one's own hand) is the most reliable demo.</a:t>
+            </a:r>
+            <a:endParaRPr lang="en-US" sz="1200" dirty="0"/>
+          </a:p>
+          <a:p>
+            <a:pPr algn="l" marL="342900" indent="-342900">
+              <a:lnSpc>
+                <a:spcPts val="1620"/>
+              </a:lnSpc>
+              <a:spcAft>
+                <a:spcPts val="300"/>
+              </a:spcAft>
+              <a:buSzPct val="100000"/>
+              <a:buChar char="•"/>
+            </a:pPr>
+            <a:r>
+              <a:rPr lang="en-US" sz="1200" dirty="0">
+                <a:solidFill>
+                  <a:srgbClr val="2C2C2C"/>
+                </a:solidFill>
+                <a:latin typeface="Verdana" pitchFamily="34" charset="0"/>
+                <a:ea typeface="Verdana" pitchFamily="34" charset="-122"/>
+                <a:cs typeface="Verdana" pitchFamily="34" charset="-120"/>
+              </a:rPr>
+              <a:t>Some children will giggle when they feel a breeze on their face. Let them giggle — surprise is good for memory.</a:t>
             </a:r>
             <a:endParaRPr lang="en-US" sz="1200" dirty="0"/>
           </a:p>
@@ -3112,7 +3598,7 @@
                 <a:ea typeface="Georgia" pitchFamily="34" charset="-122"/>
                 <a:cs typeface="Georgia" pitchFamily="34" charset="-120"/>
               </a:rPr>
-              <a:t>Materials</a:t>
+              <a:t>Goal</a:t>
             </a:r>
             <a:endParaRPr lang="en-US" sz="1800" dirty="0"/>
           </a:p>
@@ -3127,7 +3613,7 @@
         <p:spPr>
           <a:xfrm>
             <a:off x="406301" y="870942"/>
-            <a:ext cx="8498026" cy="426541"/>
+            <a:ext cx="8498026" cy="213271"/>
           </a:xfrm>
           <a:prstGeom prst="rect">
             <a:avLst/>
@@ -3160,7 +3646,99 @@
                 <a:ea typeface="Verdana" pitchFamily="34" charset="-122"/>
                 <a:cs typeface="Verdana" pitchFamily="34" charset="-120"/>
               </a:rPr>
-              <a:t>– Sunlight through a window (if possible) OR a tube light / desk lamp – One or two balloons – A small handheld paper fan (or each child folds one) – Drawing paper</a:t>
+              <a:t>Children explore </a:t>
+            </a:r>
+            <a:pPr algn="l" indent="0" marL="0">
+              <a:lnSpc>
+                <a:spcPts val="1680"/>
+              </a:lnSpc>
+              <a:spcBef>
+                <a:spcPts val="300"/>
+              </a:spcBef>
+              <a:spcAft>
+                <a:spcPts val="300"/>
+              </a:spcAft>
+              <a:buNone/>
+            </a:pPr>
+            <a:r>
+              <a:rPr lang="en-US" sz="1200" i="1" dirty="0">
+                <a:solidFill>
+                  <a:srgbClr val="2C2C2C"/>
+                </a:solidFill>
+                <a:latin typeface="Verdana" pitchFamily="34" charset="0"/>
+                <a:ea typeface="Verdana" pitchFamily="34" charset="-122"/>
+                <a:cs typeface="Verdana" pitchFamily="34" charset="-120"/>
+              </a:rPr>
+              <a:t>tejas</a:t>
+            </a:r>
+            <a:pPr algn="l" indent="0" marL="0">
+              <a:lnSpc>
+                <a:spcPts val="1680"/>
+              </a:lnSpc>
+              <a:spcBef>
+                <a:spcPts val="300"/>
+              </a:spcBef>
+              <a:spcAft>
+                <a:spcPts val="300"/>
+              </a:spcAft>
+              <a:buNone/>
+            </a:pPr>
+            <a:r>
+              <a:rPr lang="en-US" sz="1200" dirty="0">
+                <a:solidFill>
+                  <a:srgbClr val="2C2C2C"/>
+                </a:solidFill>
+                <a:latin typeface="Verdana" pitchFamily="34" charset="0"/>
+                <a:ea typeface="Verdana" pitchFamily="34" charset="-122"/>
+                <a:cs typeface="Verdana" pitchFamily="34" charset="-120"/>
+              </a:rPr>
+              <a:t> and </a:t>
+            </a:r>
+            <a:pPr algn="l" indent="0" marL="0">
+              <a:lnSpc>
+                <a:spcPts val="1680"/>
+              </a:lnSpc>
+              <a:spcBef>
+                <a:spcPts val="300"/>
+              </a:spcBef>
+              <a:spcAft>
+                <a:spcPts val="300"/>
+              </a:spcAft>
+              <a:buNone/>
+            </a:pPr>
+            <a:r>
+              <a:rPr lang="en-US" sz="1200" i="1" dirty="0">
+                <a:solidFill>
+                  <a:srgbClr val="2C2C2C"/>
+                </a:solidFill>
+                <a:latin typeface="Verdana" pitchFamily="34" charset="0"/>
+                <a:ea typeface="Verdana" pitchFamily="34" charset="-122"/>
+                <a:cs typeface="Verdana" pitchFamily="34" charset="-120"/>
+              </a:rPr>
+              <a:t>vāyu</a:t>
+            </a:r>
+            <a:pPr algn="l" indent="0" marL="0">
+              <a:lnSpc>
+                <a:spcPts val="1680"/>
+              </a:lnSpc>
+              <a:spcBef>
+                <a:spcPts val="300"/>
+              </a:spcBef>
+              <a:spcAft>
+                <a:spcPts val="300"/>
+              </a:spcAft>
+              <a:buNone/>
+            </a:pPr>
+            <a:r>
+              <a:rPr lang="en-US" sz="1200" dirty="0">
+                <a:solidFill>
+                  <a:srgbClr val="2C2C2C"/>
+                </a:solidFill>
+                <a:latin typeface="Verdana" pitchFamily="34" charset="0"/>
+                <a:ea typeface="Verdana" pitchFamily="34" charset="-122"/>
+                <a:cs typeface="Verdana" pitchFamily="34" charset="-120"/>
+              </a:rPr>
+              <a:t> through warmth, breeze, and drawing.</a:t>
             </a:r>
             <a:endParaRPr lang="en-US" sz="1200" dirty="0"/>
           </a:p>
@@ -3318,7 +3896,7 @@
                 <a:ea typeface="Georgia" pitchFamily="34" charset="-122"/>
                 <a:cs typeface="Georgia" pitchFamily="34" charset="-120"/>
               </a:rPr>
-              <a:t>The flow</a:t>
+              <a:t>Materials</a:t>
             </a:r>
             <a:endParaRPr lang="en-US" sz="1800" dirty="0"/>
           </a:p>
@@ -3327,6 +3905,124 @@
       <p:sp>
         <p:nvSpPr>
           <p:cNvPr id="4" name="Text 2"/>
+          <p:cNvSpPr/>
+          <p:nvPr/>
+        </p:nvSpPr>
+        <p:spPr>
+          <a:xfrm>
+            <a:off x="634901" y="883593"/>
+            <a:ext cx="8102798" cy="1013222"/>
+          </a:xfrm>
+          <a:prstGeom prst="rect">
+            <a:avLst/>
+          </a:prstGeom>
+          <a:noFill/>
+          <a:ln/>
+        </p:spPr>
+        <p:txBody>
+          <a:bodyPr wrap="square" lIns="0" tIns="0" rIns="0" bIns="0" rtlCol="0" anchor="t"/>
+          <a:lstStyle/>
+          <a:p>
+            <a:pPr algn="l" marL="342900" indent="-342900">
+              <a:lnSpc>
+                <a:spcPts val="1620"/>
+              </a:lnSpc>
+              <a:spcAft>
+                <a:spcPts val="300"/>
+              </a:spcAft>
+              <a:buSzPct val="100000"/>
+              <a:buChar char="•"/>
+            </a:pPr>
+            <a:r>
+              <a:rPr lang="en-US" sz="1200" dirty="0">
+                <a:solidFill>
+                  <a:srgbClr val="2C2C2C"/>
+                </a:solidFill>
+                <a:latin typeface="Verdana" pitchFamily="34" charset="0"/>
+                <a:ea typeface="Verdana" pitchFamily="34" charset="-122"/>
+                <a:cs typeface="Verdana" pitchFamily="34" charset="-120"/>
+              </a:rPr>
+              <a:t>Sunlight through a window (if possible) OR a tube light / desk lamp</a:t>
+            </a:r>
+            <a:endParaRPr lang="en-US" sz="1200" dirty="0"/>
+          </a:p>
+          <a:p>
+            <a:pPr algn="l" marL="342900" indent="-342900">
+              <a:lnSpc>
+                <a:spcPts val="1620"/>
+              </a:lnSpc>
+              <a:spcAft>
+                <a:spcPts val="300"/>
+              </a:spcAft>
+              <a:buSzPct val="100000"/>
+              <a:buChar char="•"/>
+            </a:pPr>
+            <a:r>
+              <a:rPr lang="en-US" sz="1200" dirty="0">
+                <a:solidFill>
+                  <a:srgbClr val="2C2C2C"/>
+                </a:solidFill>
+                <a:latin typeface="Verdana" pitchFamily="34" charset="0"/>
+                <a:ea typeface="Verdana" pitchFamily="34" charset="-122"/>
+                <a:cs typeface="Verdana" pitchFamily="34" charset="-120"/>
+              </a:rPr>
+              <a:t>One or two balloons</a:t>
+            </a:r>
+            <a:endParaRPr lang="en-US" sz="1200" dirty="0"/>
+          </a:p>
+          <a:p>
+            <a:pPr algn="l" marL="342900" indent="-342900">
+              <a:lnSpc>
+                <a:spcPts val="1620"/>
+              </a:lnSpc>
+              <a:spcAft>
+                <a:spcPts val="300"/>
+              </a:spcAft>
+              <a:buSzPct val="100000"/>
+              <a:buChar char="•"/>
+            </a:pPr>
+            <a:r>
+              <a:rPr lang="en-US" sz="1200" dirty="0">
+                <a:solidFill>
+                  <a:srgbClr val="2C2C2C"/>
+                </a:solidFill>
+                <a:latin typeface="Verdana" pitchFamily="34" charset="0"/>
+                <a:ea typeface="Verdana" pitchFamily="34" charset="-122"/>
+                <a:cs typeface="Verdana" pitchFamily="34" charset="-120"/>
+              </a:rPr>
+              <a:t>A small handheld paper fan (or each child folds one)</a:t>
+            </a:r>
+            <a:endParaRPr lang="en-US" sz="1200" dirty="0"/>
+          </a:p>
+          <a:p>
+            <a:pPr algn="l" marL="342900" indent="-342900">
+              <a:lnSpc>
+                <a:spcPts val="1620"/>
+              </a:lnSpc>
+              <a:spcAft>
+                <a:spcPts val="300"/>
+              </a:spcAft>
+              <a:buSzPct val="100000"/>
+              <a:buChar char="•"/>
+            </a:pPr>
+            <a:r>
+              <a:rPr lang="en-US" sz="1200" dirty="0">
+                <a:solidFill>
+                  <a:srgbClr val="2C2C2C"/>
+                </a:solidFill>
+                <a:latin typeface="Verdana" pitchFamily="34" charset="0"/>
+                <a:ea typeface="Verdana" pitchFamily="34" charset="-122"/>
+                <a:cs typeface="Verdana" pitchFamily="34" charset="-120"/>
+              </a:rPr>
+              <a:t>Drawing paper</a:t>
+            </a:r>
+            <a:endParaRPr lang="en-US" sz="1200" dirty="0"/>
+          </a:p>
+        </p:txBody>
+      </p:sp>
+      <p:sp>
+        <p:nvSpPr>
+          <p:cNvPr id="5" name="Text 3"/>
           <p:cNvSpPr/>
           <p:nvPr/>
         </p:nvSpPr>
@@ -3476,7 +4172,7 @@
                 <a:ea typeface="Georgia" pitchFamily="34" charset="-122"/>
                 <a:cs typeface="Georgia" pitchFamily="34" charset="-120"/>
               </a:rPr>
-              <a:t>Settle + chant (5 min)</a:t>
+              <a:t>The flow</a:t>
             </a:r>
             <a:endParaRPr lang="en-US" sz="1800" dirty="0"/>
           </a:p>
@@ -3485,54 +4181,6 @@
       <p:sp>
         <p:nvSpPr>
           <p:cNvPr id="4" name="Text 2"/>
-          <p:cNvSpPr/>
-          <p:nvPr/>
-        </p:nvSpPr>
-        <p:spPr>
-          <a:xfrm>
-            <a:off x="406301" y="870942"/>
-            <a:ext cx="8498026" cy="213271"/>
-          </a:xfrm>
-          <a:prstGeom prst="rect">
-            <a:avLst/>
-          </a:prstGeom>
-          <a:noFill/>
-          <a:ln/>
-        </p:spPr>
-        <p:txBody>
-          <a:bodyPr wrap="square" lIns="0" tIns="0" rIns="0" bIns="0" rtlCol="0" anchor="t"/>
-          <a:lstStyle/>
-          <a:p>
-            <a:pPr algn="l" indent="0" marL="0">
-              <a:lnSpc>
-                <a:spcPts val="1680"/>
-              </a:lnSpc>
-              <a:spcBef>
-                <a:spcPts val="300"/>
-              </a:spcBef>
-              <a:spcAft>
-                <a:spcPts val="300"/>
-              </a:spcAft>
-              <a:buNone/>
-            </a:pPr>
-            <a:r>
-              <a:rPr lang="en-US" sz="1200" dirty="0">
-                <a:solidFill>
-                  <a:srgbClr val="2C2C2C"/>
-                </a:solidFill>
-                <a:latin typeface="Verdana" pitchFamily="34" charset="0"/>
-                <a:ea typeface="Verdana" pitchFamily="34" charset="-122"/>
-                <a:cs typeface="Verdana" pitchFamily="34" charset="-120"/>
-              </a:rPr>
-              <a:t>Daily chant.</a:t>
-            </a:r>
-            <a:endParaRPr lang="en-US" sz="1200" dirty="0"/>
-          </a:p>
-        </p:txBody>
-      </p:sp>
-      <p:sp>
-        <p:nvSpPr>
-          <p:cNvPr id="5" name="Text 3"/>
           <p:cNvSpPr/>
           <p:nvPr/>
         </p:nvSpPr>
@@ -3682,7 +4330,7 @@
                 <a:ea typeface="Georgia" pitchFamily="34" charset="-122"/>
                 <a:cs typeface="Georgia" pitchFamily="34" charset="-120"/>
               </a:rPr>
-              <a:t>Story — recall (3 min)</a:t>
+              <a:t>Settle + chant (5 min)</a:t>
             </a:r>
             <a:endParaRPr lang="en-US" sz="1800" dirty="0"/>
           </a:p>
@@ -3697,7 +4345,7 @@
         <p:spPr>
           <a:xfrm>
             <a:off x="406301" y="870942"/>
-            <a:ext cx="8498026" cy="426541"/>
+            <a:ext cx="8498026" cy="213271"/>
           </a:xfrm>
           <a:prstGeom prst="rect">
             <a:avLst/>
@@ -3722,7 +4370,7 @@
               <a:buNone/>
             </a:pPr>
             <a:r>
-              <a:rPr lang="en-US" sz="1200" i="1" dirty="0">
+              <a:rPr lang="en-US" sz="1200" dirty="0">
                 <a:solidFill>
                   <a:srgbClr val="2C2C2C"/>
                 </a:solidFill>
@@ -3730,53 +4378,7 @@
                 <a:ea typeface="Verdana" pitchFamily="34" charset="-122"/>
                 <a:cs typeface="Verdana" pitchFamily="34" charset="-120"/>
               </a:rPr>
-              <a:t>"Who remembers our five friends?"</a:t>
-            </a:r>
-            <a:pPr algn="l" indent="0" marL="0">
-              <a:lnSpc>
-                <a:spcPts val="1680"/>
-              </a:lnSpc>
-              <a:spcBef>
-                <a:spcPts val="300"/>
-              </a:spcBef>
-              <a:spcAft>
-                <a:spcPts val="300"/>
-              </a:spcAft>
-              <a:buNone/>
-            </a:pPr>
-            <a:r>
-              <a:rPr lang="en-US" sz="1200" dirty="0">
-                <a:solidFill>
-                  <a:srgbClr val="2C2C2C"/>
-                </a:solidFill>
-                <a:latin typeface="Verdana" pitchFamily="34" charset="0"/>
-                <a:ea typeface="Verdana" pitchFamily="34" charset="-122"/>
-                <a:cs typeface="Verdana" pitchFamily="34" charset="-120"/>
-              </a:rPr>
-              <a:t> — chorus all five. </a:t>
-            </a:r>
-            <a:pPr algn="l" indent="0" marL="0">
-              <a:lnSpc>
-                <a:spcPts val="1680"/>
-              </a:lnSpc>
-              <a:spcBef>
-                <a:spcPts val="300"/>
-              </a:spcBef>
-              <a:spcAft>
-                <a:spcPts val="300"/>
-              </a:spcAft>
-              <a:buNone/>
-            </a:pPr>
-            <a:r>
-              <a:rPr lang="en-US" sz="1200" i="1" dirty="0">
-                <a:solidFill>
-                  <a:srgbClr val="2C2C2C"/>
-                </a:solidFill>
-                <a:latin typeface="Verdana" pitchFamily="34" charset="0"/>
-                <a:ea typeface="Verdana" pitchFamily="34" charset="-122"/>
-                <a:cs typeface="Verdana" pitchFamily="34" charset="-120"/>
-              </a:rPr>
-              <a:t>"Yesterday we met Pṛthvī and Ap. Today: Tejas and Vāyu."</a:t>
+              <a:t>Daily chant.</a:t>
             </a:r>
             <a:endParaRPr lang="en-US" sz="1200" dirty="0"/>
           </a:p>
@@ -3934,7 +4536,7 @@
                 <a:ea typeface="Georgia" pitchFamily="34" charset="-122"/>
                 <a:cs typeface="Georgia" pitchFamily="34" charset="-120"/>
               </a:rPr>
-              <a:t>Feel station: Fire/warmth (7 min)</a:t>
+              <a:t>Story — recall (3 min)</a:t>
             </a:r>
             <a:endParaRPr lang="en-US" sz="1800" dirty="0"/>
           </a:p>
@@ -3949,7 +4551,7 @@
         <p:spPr>
           <a:xfrm>
             <a:off x="406301" y="870942"/>
-            <a:ext cx="8498026" cy="213271"/>
+            <a:ext cx="8498026" cy="426541"/>
           </a:xfrm>
           <a:prstGeom prst="rect">
             <a:avLst/>
@@ -3974,7 +4576,7 @@
               <a:buNone/>
             </a:pPr>
             <a:r>
-              <a:rPr lang="en-US" sz="1200" dirty="0">
+              <a:rPr lang="en-US" sz="1200" i="1" dirty="0">
                 <a:solidFill>
                   <a:srgbClr val="2C2C2C"/>
                 </a:solidFill>
@@ -3982,45 +4584,22 @@
                 <a:ea typeface="Verdana" pitchFamily="34" charset="-122"/>
                 <a:cs typeface="Verdana" pitchFamily="34" charset="-120"/>
               </a:rPr>
-              <a:t>– Take children to a sunny window or under a warm tube light.</a:t>
-            </a:r>
-            <a:endParaRPr lang="en-US" sz="1200" dirty="0"/>
-          </a:p>
-        </p:txBody>
-      </p:sp>
-      <p:sp>
-        <p:nvSpPr>
-          <p:cNvPr id="5" name="Text 3"/>
-          <p:cNvSpPr/>
-          <p:nvPr/>
-        </p:nvSpPr>
-        <p:spPr>
-          <a:xfrm>
-            <a:off x="634901" y="1173063"/>
-            <a:ext cx="8102798" cy="1180802"/>
-          </a:xfrm>
-          <a:prstGeom prst="rect">
-            <a:avLst/>
-          </a:prstGeom>
-          <a:noFill/>
-          <a:ln/>
-        </p:spPr>
-        <p:txBody>
-          <a:bodyPr wrap="square" lIns="0" tIns="0" rIns="0" bIns="0" rtlCol="0" anchor="t"/>
-          <a:lstStyle/>
-          <a:p>
-            <a:pPr algn="l" marL="342900" indent="-342900">
-              <a:lnSpc>
-                <a:spcPts val="1620"/>
-              </a:lnSpc>
-              <a:spcAft>
-                <a:spcPts val="300"/>
-              </a:spcAft>
-              <a:buSzPct val="100000"/>
-              <a:buChar char="•"/>
-            </a:pPr>
-            <a:r>
-              <a:rPr lang="en-US" sz="1200" i="1" dirty="0">
+              <a:t>"Who remembers our five friends?"</a:t>
+            </a:r>
+            <a:pPr algn="l" indent="0" marL="0">
+              <a:lnSpc>
+                <a:spcPts val="1680"/>
+              </a:lnSpc>
+              <a:spcBef>
+                <a:spcPts val="300"/>
+              </a:spcBef>
+              <a:spcAft>
+                <a:spcPts val="300"/>
+              </a:spcAft>
+              <a:buNone/>
+            </a:pPr>
+            <a:r>
+              <a:rPr lang="en-US" sz="1200" dirty="0">
                 <a:solidFill>
                   <a:srgbClr val="2C2C2C"/>
                 </a:solidFill>
@@ -4028,19 +4607,22 @@
                 <a:ea typeface="Verdana" pitchFamily="34" charset="-122"/>
                 <a:cs typeface="Verdana" pitchFamily="34" charset="-120"/>
               </a:rPr>
-              <a:t>"Put your hand up. What do you feel?"</a:t>
+              <a:t> — chorus all five. </a:t>
             </a:r>
             <a:pPr algn="l" indent="0" marL="0">
               <a:lnSpc>
-                <a:spcPts val="1620"/>
-              </a:lnSpc>
-              <a:spcAft>
-                <a:spcPts val="300"/>
-              </a:spcAft>
-              <a:buNone/>
-            </a:pPr>
-            <a:r>
-              <a:rPr lang="en-US" sz="1200" dirty="0">
+                <a:spcPts val="1680"/>
+              </a:lnSpc>
+              <a:spcBef>
+                <a:spcPts val="300"/>
+              </a:spcBef>
+              <a:spcAft>
+                <a:spcPts val="300"/>
+              </a:spcAft>
+              <a:buNone/>
+            </a:pPr>
+            <a:r>
+              <a:rPr lang="en-US" sz="1200" i="1" dirty="0">
                 <a:solidFill>
                   <a:srgbClr val="2C2C2C"/>
                 </a:solidFill>
@@ -4048,111 +4630,15 @@
                 <a:ea typeface="Verdana" pitchFamily="34" charset="-122"/>
                 <a:cs typeface="Verdana" pitchFamily="34" charset="-120"/>
               </a:rPr>
-              <a:t> (Warm.)</a:t>
+              <a:t>"Yesterday we met Pṛthvī and Ap. Today: Tejas and Vāyu."</a:t>
             </a:r>
             <a:endParaRPr lang="en-US" sz="1200" dirty="0"/>
           </a:p>
-          <a:p>
-            <a:pPr algn="l" marL="342900" indent="-342900">
-              <a:lnSpc>
-                <a:spcPts val="1620"/>
-              </a:lnSpc>
-              <a:spcAft>
-                <a:spcPts val="300"/>
-              </a:spcAft>
-              <a:buSzPct val="100000"/>
-              <a:buChar char="•"/>
-            </a:pPr>
-            <a:r>
-              <a:rPr lang="en-US" sz="1200" i="1" dirty="0">
-                <a:solidFill>
-                  <a:srgbClr val="2C2C2C"/>
-                </a:solidFill>
-                <a:latin typeface="Verdana" pitchFamily="34" charset="0"/>
-                <a:ea typeface="Verdana" pitchFamily="34" charset="-122"/>
-                <a:cs typeface="Verdana" pitchFamily="34" charset="-120"/>
-              </a:rPr>
-              <a:t>"That warmth is Tejas. The sun gives us Tejas. A candle gives us Tejas. Your body makes a little Tejas — touch your hand to your cheek."</a:t>
-            </a:r>
-            <a:endParaRPr lang="en-US" sz="1200" dirty="0"/>
-          </a:p>
-          <a:p>
-            <a:pPr algn="l" marL="342900" indent="-342900">
-              <a:lnSpc>
-                <a:spcPts val="1620"/>
-              </a:lnSpc>
-              <a:spcAft>
-                <a:spcPts val="300"/>
-              </a:spcAft>
-              <a:buSzPct val="100000"/>
-              <a:buChar char="•"/>
-            </a:pPr>
-            <a:r>
-              <a:rPr lang="en-US" sz="1200" i="1" dirty="0">
-                <a:solidFill>
-                  <a:srgbClr val="2C2C2C"/>
-                </a:solidFill>
-                <a:latin typeface="Verdana" pitchFamily="34" charset="0"/>
-                <a:ea typeface="Verdana" pitchFamily="34" charset="-122"/>
-                <a:cs typeface="Verdana" pitchFamily="34" charset="-120"/>
-              </a:rPr>
-              <a:t>"Tejas is also what cooks our food. Tejas is what helps us digest. Tejas is everywhere there is heat or light."</a:t>
-            </a:r>
-            <a:endParaRPr lang="en-US" sz="1200" dirty="0"/>
-          </a:p>
-        </p:txBody>
-      </p:sp>
-      <p:sp>
-        <p:nvSpPr>
-          <p:cNvPr id="6" name="Text 4"/>
-          <p:cNvSpPr/>
-          <p:nvPr/>
-        </p:nvSpPr>
-        <p:spPr>
-          <a:xfrm>
-            <a:off x="406301" y="2442716"/>
-            <a:ext cx="8498026" cy="213271"/>
-          </a:xfrm>
-          <a:prstGeom prst="rect">
-            <a:avLst/>
-          </a:prstGeom>
-          <a:noFill/>
-          <a:ln/>
-        </p:spPr>
-        <p:txBody>
-          <a:bodyPr wrap="square" lIns="0" tIns="0" rIns="0" bIns="0" rtlCol="0" anchor="t"/>
-          <a:lstStyle/>
-          <a:p>
-            <a:pPr algn="l" indent="0" marL="0">
-              <a:lnSpc>
-                <a:spcPts val="1680"/>
-              </a:lnSpc>
-              <a:spcBef>
-                <a:spcPts val="300"/>
-              </a:spcBef>
-              <a:spcAft>
-                <a:spcPts val="300"/>
-              </a:spcAft>
-              <a:buNone/>
-            </a:pPr>
-            <a:r>
-              <a:rPr lang="en-US" sz="1200" dirty="0">
-                <a:solidFill>
-                  <a:srgbClr val="2C2C2C"/>
-                </a:solidFill>
-                <a:latin typeface="Verdana" pitchFamily="34" charset="0"/>
-                <a:ea typeface="Verdana" pitchFamily="34" charset="-122"/>
-                <a:cs typeface="Verdana" pitchFamily="34" charset="-120"/>
-              </a:rPr>
-              <a:t>(No actual flame in class. Children's bring-from-home objects — torches, candle pictures — can be shared.)</a:t>
-            </a:r>
-            <a:endParaRPr lang="en-US" sz="1200" dirty="0"/>
-          </a:p>
-        </p:txBody>
-      </p:sp>
-      <p:sp>
-        <p:nvSpPr>
-          <p:cNvPr id="7" name="Text 5"/>
+        </p:txBody>
+      </p:sp>
+      <p:sp>
+        <p:nvSpPr>
+          <p:cNvPr id="5" name="Text 3"/>
           <p:cNvSpPr/>
           <p:nvPr/>
         </p:nvSpPr>
@@ -4302,7 +4788,7 @@
                 <a:ea typeface="Georgia" pitchFamily="34" charset="-122"/>
                 <a:cs typeface="Georgia" pitchFamily="34" charset="-120"/>
               </a:rPr>
-              <a:t>Feel station: Air (7 min)</a:t>
+              <a:t>Feel station: Fire/warmth (7 min)</a:t>
             </a:r>
             <a:endParaRPr lang="en-US" sz="1800" dirty="0"/>
           </a:p>
@@ -4316,8 +4802,8 @@
         </p:nvSpPr>
         <p:spPr>
           <a:xfrm>
-            <a:off x="406301" y="870942"/>
-            <a:ext cx="8498026" cy="213271"/>
+            <a:off x="634901" y="883593"/>
+            <a:ext cx="8102798" cy="1424583"/>
           </a:xfrm>
           <a:prstGeom prst="rect">
             <a:avLst/>
@@ -4329,17 +4815,15 @@
           <a:bodyPr wrap="square" lIns="0" tIns="0" rIns="0" bIns="0" rtlCol="0" anchor="t"/>
           <a:lstStyle/>
           <a:p>
-            <a:pPr algn="l" indent="0" marL="0">
-              <a:lnSpc>
-                <a:spcPts val="1680"/>
-              </a:lnSpc>
-              <a:spcBef>
-                <a:spcPts val="300"/>
-              </a:spcBef>
-              <a:spcAft>
-                <a:spcPts val="300"/>
-              </a:spcAft>
-              <a:buNone/>
+            <a:pPr algn="l" marL="342900" indent="-342900">
+              <a:lnSpc>
+                <a:spcPts val="1620"/>
+              </a:lnSpc>
+              <a:spcAft>
+                <a:spcPts val="300"/>
+              </a:spcAft>
+              <a:buSzPct val="100000"/>
+              <a:buChar char="•"/>
             </a:pPr>
             <a:r>
               <a:rPr lang="en-US" sz="1200" dirty="0">
@@ -4350,32 +4834,10 @@
                 <a:ea typeface="Verdana" pitchFamily="34" charset="-122"/>
                 <a:cs typeface="Verdana" pitchFamily="34" charset="-120"/>
               </a:rPr>
-              <a:t>– Show a balloon. Inflate and release; watch it fly.</a:t>
+              <a:t>Take children to a sunny window or under a warm tube light.</a:t>
             </a:r>
             <a:endParaRPr lang="en-US" sz="1200" dirty="0"/>
           </a:p>
-        </p:txBody>
-      </p:sp>
-      <p:sp>
-        <p:nvSpPr>
-          <p:cNvPr id="5" name="Text 3"/>
-          <p:cNvSpPr/>
-          <p:nvPr/>
-        </p:nvSpPr>
-        <p:spPr>
-          <a:xfrm>
-            <a:off x="634901" y="1173063"/>
-            <a:ext cx="8102798" cy="281880"/>
-          </a:xfrm>
-          <a:prstGeom prst="rect">
-            <a:avLst/>
-          </a:prstGeom>
-          <a:noFill/>
-          <a:ln/>
-        </p:spPr>
-        <p:txBody>
-          <a:bodyPr wrap="square" lIns="0" tIns="0" rIns="0" bIns="0" rtlCol="0" anchor="t"/>
-          <a:lstStyle/>
           <a:p>
             <a:pPr algn="l" marL="342900" indent="-342900">
               <a:lnSpc>
@@ -4396,7 +4858,7 @@
                 <a:ea typeface="Verdana" pitchFamily="34" charset="-122"/>
                 <a:cs typeface="Verdana" pitchFamily="34" charset="-120"/>
               </a:rPr>
-              <a:t>"What was inside the balloon?"</a:t>
+              <a:t>"Put your hand up. What do you feel?"</a:t>
             </a:r>
             <a:pPr algn="l" indent="0" marL="0">
               <a:lnSpc>
@@ -4416,47 +4878,23 @@
                 <a:ea typeface="Verdana" pitchFamily="34" charset="-122"/>
                 <a:cs typeface="Verdana" pitchFamily="34" charset="-120"/>
               </a:rPr>
-              <a:t> (Air.)</a:t>
+              <a:t> (Warm.)</a:t>
             </a:r>
             <a:endParaRPr lang="en-US" sz="1200" dirty="0"/>
           </a:p>
-        </p:txBody>
-      </p:sp>
-      <p:sp>
-        <p:nvSpPr>
-          <p:cNvPr id="6" name="Text 4"/>
-          <p:cNvSpPr/>
-          <p:nvPr/>
-        </p:nvSpPr>
-        <p:spPr>
-          <a:xfrm>
-            <a:off x="406301" y="1543794"/>
-            <a:ext cx="8498026" cy="426541"/>
-          </a:xfrm>
-          <a:prstGeom prst="rect">
-            <a:avLst/>
-          </a:prstGeom>
-          <a:noFill/>
-          <a:ln/>
-        </p:spPr>
-        <p:txBody>
-          <a:bodyPr wrap="square" lIns="0" tIns="0" rIns="0" bIns="0" rtlCol="0" anchor="t"/>
-          <a:lstStyle/>
-          <a:p>
-            <a:pPr algn="l" indent="0" marL="0">
-              <a:lnSpc>
-                <a:spcPts val="1680"/>
-              </a:lnSpc>
-              <a:spcBef>
-                <a:spcPts val="300"/>
-              </a:spcBef>
-              <a:spcAft>
-                <a:spcPts val="300"/>
-              </a:spcAft>
-              <a:buNone/>
-            </a:pPr>
-            <a:r>
-              <a:rPr lang="en-US" sz="1200" dirty="0">
+          <a:p>
+            <a:pPr algn="l" marL="342900" indent="-342900">
+              <a:lnSpc>
+                <a:spcPts val="1620"/>
+              </a:lnSpc>
+              <a:spcAft>
+                <a:spcPts val="300"/>
+              </a:spcAft>
+              <a:buSzPct val="100000"/>
+              <a:buChar char="•"/>
+            </a:pPr>
+            <a:r>
+              <a:rPr lang="en-US" sz="1200" i="1" dirty="0">
                 <a:solidFill>
                   <a:srgbClr val="2C2C2C"/>
                 </a:solidFill>
@@ -4464,19 +4902,20 @@
                 <a:ea typeface="Verdana" pitchFamily="34" charset="-122"/>
                 <a:cs typeface="Verdana" pitchFamily="34" charset="-120"/>
               </a:rPr>
-              <a:t>– Give each child a fan (or make one from paper). – Fan their own face. </a:t>
-            </a:r>
-            <a:pPr algn="l" indent="0" marL="0">
-              <a:lnSpc>
-                <a:spcPts val="1680"/>
-              </a:lnSpc>
-              <a:spcBef>
-                <a:spcPts val="300"/>
-              </a:spcBef>
-              <a:spcAft>
-                <a:spcPts val="300"/>
-              </a:spcAft>
-              <a:buNone/>
+              <a:t>"That warmth is Tejas. The sun gives us Tejas. A candle gives us Tejas. Your body makes a little Tejas — touch your hand to your cheek."</a:t>
+            </a:r>
+            <a:endParaRPr lang="en-US" sz="1200" dirty="0"/>
+          </a:p>
+          <a:p>
+            <a:pPr algn="l" marL="342900" indent="-342900">
+              <a:lnSpc>
+                <a:spcPts val="1620"/>
+              </a:lnSpc>
+              <a:spcAft>
+                <a:spcPts val="300"/>
+              </a:spcAft>
+              <a:buSzPct val="100000"/>
+              <a:buChar char="•"/>
             </a:pPr>
             <a:r>
               <a:rPr lang="en-US" sz="1200" i="1" dirty="0">
@@ -4487,7 +4926,7 @@
                 <a:ea typeface="Verdana" pitchFamily="34" charset="-122"/>
                 <a:cs typeface="Verdana" pitchFamily="34" charset="-120"/>
               </a:rPr>
-              <a:t>"That's Vāyu. When the wind blows your hair, that's Vāyu. When you breathe in, that's Vāyu coming inside you."</a:t>
+              <a:t>"Tejas is also what cooks our food. Tejas is what helps us digest. Tejas is everywhere there is heat or light."</a:t>
             </a:r>
             <a:endParaRPr lang="en-US" sz="1200" dirty="0"/>
           </a:p>
@@ -4495,53 +4934,7 @@
       </p:sp>
       <p:sp>
         <p:nvSpPr>
-          <p:cNvPr id="7" name="Text 5"/>
-          <p:cNvSpPr/>
-          <p:nvPr/>
-        </p:nvSpPr>
-        <p:spPr>
-          <a:xfrm>
-            <a:off x="634901" y="2059186"/>
-            <a:ext cx="8102798" cy="281880"/>
-          </a:xfrm>
-          <a:prstGeom prst="rect">
-            <a:avLst/>
-          </a:prstGeom>
-          <a:noFill/>
-          <a:ln/>
-        </p:spPr>
-        <p:txBody>
-          <a:bodyPr wrap="square" lIns="0" tIns="0" rIns="0" bIns="0" rtlCol="0" anchor="t"/>
-          <a:lstStyle/>
-          <a:p>
-            <a:pPr algn="l" marL="342900" indent="-342900">
-              <a:lnSpc>
-                <a:spcPts val="1620"/>
-              </a:lnSpc>
-              <a:spcAft>
-                <a:spcPts val="300"/>
-              </a:spcAft>
-              <a:buSzPct val="100000"/>
-              <a:buChar char="•"/>
-            </a:pPr>
-            <a:r>
-              <a:rPr lang="en-US" sz="1200" i="1" dirty="0">
-                <a:solidFill>
-                  <a:srgbClr val="2C2C2C"/>
-                </a:solidFill>
-                <a:latin typeface="Verdana" pitchFamily="34" charset="0"/>
-                <a:ea typeface="Verdana" pitchFamily="34" charset="-122"/>
-                <a:cs typeface="Verdana" pitchFamily="34" charset="-120"/>
-              </a:rPr>
-              <a:t>"Everything that flows and is invisible — that's Vāyu."</a:t>
-            </a:r>
-            <a:endParaRPr lang="en-US" sz="1200" dirty="0"/>
-          </a:p>
-        </p:txBody>
-      </p:sp>
-      <p:sp>
-        <p:nvSpPr>
-          <p:cNvPr id="8" name="Text 6"/>
+          <p:cNvPr id="5" name="Text 3"/>
           <p:cNvSpPr/>
           <p:nvPr/>
         </p:nvSpPr>
@@ -4691,7 +5084,7 @@
                 <a:ea typeface="Georgia" pitchFamily="34" charset="-122"/>
                 <a:cs typeface="Georgia" pitchFamily="34" charset="-120"/>
               </a:rPr>
-              <a:t>Draw (10 min)</a:t>
+              <a:t>Feel station: Fire/warmth (7 min) (cont.)</a:t>
             </a:r>
             <a:endParaRPr lang="en-US" sz="1800" dirty="0"/>
           </a:p>
@@ -4739,7 +5132,7 @@
                 <a:ea typeface="Verdana" pitchFamily="34" charset="-122"/>
                 <a:cs typeface="Verdana" pitchFamily="34" charset="-120"/>
               </a:rPr>
-              <a:t>Each child draws: – TOP: one Tejas thing they like. – BOTTOM: one Vāyu thing they like.</a:t>
+              <a:t>(No actual flame in class. Children's bring-from-home objects — torches, candle pictures — can be shared.)</a:t>
             </a:r>
             <a:endParaRPr lang="en-US" sz="1200" dirty="0"/>
           </a:p>
@@ -4897,7 +5290,7 @@
                 <a:ea typeface="Georgia" pitchFamily="34" charset="-122"/>
                 <a:cs typeface="Georgia" pitchFamily="34" charset="-120"/>
               </a:rPr>
-              <a:t>Show + chant (3 min)</a:t>
+              <a:t>Feel station: Air (7 min)</a:t>
             </a:r>
             <a:endParaRPr lang="en-US" sz="1800" dirty="0"/>
           </a:p>
@@ -4911,8 +5304,8 @@
         </p:nvSpPr>
         <p:spPr>
           <a:xfrm>
-            <a:off x="406301" y="870942"/>
-            <a:ext cx="8498026" cy="213271"/>
+            <a:off x="634901" y="883593"/>
+            <a:ext cx="8102798" cy="1462683"/>
           </a:xfrm>
           <a:prstGeom prst="rect">
             <a:avLst/>
@@ -4924,17 +5317,15 @@
           <a:bodyPr wrap="square" lIns="0" tIns="0" rIns="0" bIns="0" rtlCol="0" anchor="t"/>
           <a:lstStyle/>
           <a:p>
-            <a:pPr algn="l" indent="0" marL="0">
-              <a:lnSpc>
-                <a:spcPts val="1680"/>
-              </a:lnSpc>
-              <a:spcBef>
-                <a:spcPts val="300"/>
-              </a:spcBef>
-              <a:spcAft>
-                <a:spcPts val="300"/>
-              </a:spcAft>
-              <a:buNone/>
+            <a:pPr algn="l" marL="342900" indent="-342900">
+              <a:lnSpc>
+                <a:spcPts val="1620"/>
+              </a:lnSpc>
+              <a:spcAft>
+                <a:spcPts val="300"/>
+              </a:spcAft>
+              <a:buSzPct val="100000"/>
+              <a:buChar char="•"/>
             </a:pPr>
             <a:r>
               <a:rPr lang="en-US" sz="1200" dirty="0">
@@ -4945,7 +5336,143 @@
                 <a:ea typeface="Verdana" pitchFamily="34" charset="-122"/>
                 <a:cs typeface="Verdana" pitchFamily="34" charset="-120"/>
               </a:rPr>
-              <a:t>2 shares. Daily chant to close.</a:t>
+              <a:t>Show a balloon. Inflate and release; watch it fly.</a:t>
+            </a:r>
+            <a:endParaRPr lang="en-US" sz="1200" dirty="0"/>
+          </a:p>
+          <a:p>
+            <a:pPr algn="l" marL="342900" indent="-342900">
+              <a:lnSpc>
+                <a:spcPts val="1620"/>
+              </a:lnSpc>
+              <a:spcAft>
+                <a:spcPts val="300"/>
+              </a:spcAft>
+              <a:buSzPct val="100000"/>
+              <a:buChar char="•"/>
+            </a:pPr>
+            <a:r>
+              <a:rPr lang="en-US" sz="1200" i="1" dirty="0">
+                <a:solidFill>
+                  <a:srgbClr val="2C2C2C"/>
+                </a:solidFill>
+                <a:latin typeface="Verdana" pitchFamily="34" charset="0"/>
+                <a:ea typeface="Verdana" pitchFamily="34" charset="-122"/>
+                <a:cs typeface="Verdana" pitchFamily="34" charset="-120"/>
+              </a:rPr>
+              <a:t>"What was inside the balloon?"</a:t>
+            </a:r>
+            <a:pPr algn="l" indent="0" marL="0">
+              <a:lnSpc>
+                <a:spcPts val="1620"/>
+              </a:lnSpc>
+              <a:spcAft>
+                <a:spcPts val="300"/>
+              </a:spcAft>
+              <a:buNone/>
+            </a:pPr>
+            <a:r>
+              <a:rPr lang="en-US" sz="1200" dirty="0">
+                <a:solidFill>
+                  <a:srgbClr val="2C2C2C"/>
+                </a:solidFill>
+                <a:latin typeface="Verdana" pitchFamily="34" charset="0"/>
+                <a:ea typeface="Verdana" pitchFamily="34" charset="-122"/>
+                <a:cs typeface="Verdana" pitchFamily="34" charset="-120"/>
+              </a:rPr>
+              <a:t> (Air.)</a:t>
+            </a:r>
+            <a:endParaRPr lang="en-US" sz="1200" dirty="0"/>
+          </a:p>
+          <a:p>
+            <a:pPr algn="l" marL="342900" indent="-342900">
+              <a:lnSpc>
+                <a:spcPts val="1620"/>
+              </a:lnSpc>
+              <a:spcAft>
+                <a:spcPts val="300"/>
+              </a:spcAft>
+              <a:buSzPct val="100000"/>
+              <a:buChar char="•"/>
+            </a:pPr>
+            <a:r>
+              <a:rPr lang="en-US" sz="1200" dirty="0">
+                <a:solidFill>
+                  <a:srgbClr val="2C2C2C"/>
+                </a:solidFill>
+                <a:latin typeface="Verdana" pitchFamily="34" charset="0"/>
+                <a:ea typeface="Verdana" pitchFamily="34" charset="-122"/>
+                <a:cs typeface="Verdana" pitchFamily="34" charset="-120"/>
+              </a:rPr>
+              <a:t>Give each child a fan (or make one from paper).</a:t>
+            </a:r>
+            <a:endParaRPr lang="en-US" sz="1200" dirty="0"/>
+          </a:p>
+          <a:p>
+            <a:pPr algn="l" marL="342900" indent="-342900">
+              <a:lnSpc>
+                <a:spcPts val="1620"/>
+              </a:lnSpc>
+              <a:spcAft>
+                <a:spcPts val="300"/>
+              </a:spcAft>
+              <a:buSzPct val="100000"/>
+              <a:buChar char="•"/>
+            </a:pPr>
+            <a:r>
+              <a:rPr lang="en-US" sz="1200" dirty="0">
+                <a:solidFill>
+                  <a:srgbClr val="2C2C2C"/>
+                </a:solidFill>
+                <a:latin typeface="Verdana" pitchFamily="34" charset="0"/>
+                <a:ea typeface="Verdana" pitchFamily="34" charset="-122"/>
+                <a:cs typeface="Verdana" pitchFamily="34" charset="-120"/>
+              </a:rPr>
+              <a:t>Fan their own face. </a:t>
+            </a:r>
+            <a:pPr algn="l" indent="0" marL="0">
+              <a:lnSpc>
+                <a:spcPts val="1620"/>
+              </a:lnSpc>
+              <a:spcAft>
+                <a:spcPts val="300"/>
+              </a:spcAft>
+              <a:buNone/>
+            </a:pPr>
+            <a:r>
+              <a:rPr lang="en-US" sz="1200" i="1" dirty="0">
+                <a:solidFill>
+                  <a:srgbClr val="2C2C2C"/>
+                </a:solidFill>
+                <a:latin typeface="Verdana" pitchFamily="34" charset="0"/>
+                <a:ea typeface="Verdana" pitchFamily="34" charset="-122"/>
+                <a:cs typeface="Verdana" pitchFamily="34" charset="-120"/>
+              </a:rPr>
+              <a:t>"That's Vāyu. When the wind blows your hair, that's Vāyu. When you breathe in, that's Vāyu coming inside you."</a:t>
+            </a:r>
+            <a:endParaRPr lang="en-US" sz="1200" dirty="0"/>
+          </a:p>
+          <a:p>
+            <a:pPr algn="l" marL="342900" indent="-342900">
+              <a:lnSpc>
+                <a:spcPts val="1620"/>
+              </a:lnSpc>
+              <a:spcAft>
+                <a:spcPts val="300"/>
+              </a:spcAft>
+              <a:buSzPct val="100000"/>
+              <a:buChar char="•"/>
+            </a:pPr>
+            <a:r>
+              <a:rPr lang="en-US" sz="1200" i="1" dirty="0">
+                <a:solidFill>
+                  <a:srgbClr val="2C2C2C"/>
+                </a:solidFill>
+                <a:latin typeface="Verdana" pitchFamily="34" charset="0"/>
+                <a:ea typeface="Verdana" pitchFamily="34" charset="-122"/>
+                <a:cs typeface="Verdana" pitchFamily="34" charset="-120"/>
+              </a:rPr>
+              <a:t>"Everything that flows and is invisible — that's Vāyu."</a:t>
             </a:r>
             <a:endParaRPr lang="en-US" sz="1200" dirty="0"/>
           </a:p>
